--- a/slides/update_meetings_template.pptx
+++ b/slides/update_meetings_template.pptx
@@ -226,7 +226,7 @@
           <a:p>
             <a:fld id="{5D634CDC-2FDF-4C1B-8C8F-397BA5B2D9C2}" type="datetimeFigureOut">
               <a:rPr lang="de-DE" smtClean="0"/>
-              <a:t>26.02.2025</a:t>
+              <a:t>27.03.25</a:t>
             </a:fld>
             <a:endParaRPr lang="de-DE"/>
           </a:p>
@@ -304,7 +304,7 @@
           <a:p>
             <a:fld id="{51195541-E046-4C25-AC9C-3C3CC6DA515C}" type="slidenum">
               <a:rPr lang="de-DE" smtClean="0"/>
-              <a:t>‹Nr.›</a:t>
+              <a:t>‹#›</a:t>
             </a:fld>
             <a:endParaRPr lang="de-DE"/>
           </a:p>
@@ -403,7 +403,7 @@
           <a:p>
             <a:fld id="{41D9D135-AC5D-412D-9E0E-623545EAE33D}" type="datetimeFigureOut">
               <a:rPr lang="de-DE" smtClean="0"/>
-              <a:t>26.02.2025</a:t>
+              <a:t>27.03.25</a:t>
             </a:fld>
             <a:endParaRPr lang="de-DE"/>
           </a:p>
@@ -561,7 +561,7 @@
           <a:p>
             <a:fld id="{4A2621F5-529A-4D54-A085-69F194259C1B}" type="slidenum">
               <a:rPr lang="de-DE" smtClean="0"/>
-              <a:t>‹Nr.›</a:t>
+              <a:t>‹#›</a:t>
             </a:fld>
             <a:endParaRPr lang="de-DE"/>
           </a:p>
@@ -1574,8 +1574,8 @@
         </p:nvSpPr>
         <p:spPr>
           <a:xfrm>
-            <a:off x="371476" y="340151"/>
-            <a:ext cx="2860674" cy="960329"/>
+            <a:off x="371475" y="340151"/>
+            <a:ext cx="4086225" cy="960329"/>
           </a:xfrm>
           <a:prstGeom prst="rect">
             <a:avLst/>
@@ -1599,7 +1599,7 @@
             </a:pPr>
             <a:r>
               <a:rPr lang="de-DE" sz="1450" dirty="0"/>
-              <a:t>Hochschule </a:t>
+              <a:t>Hochschule München </a:t>
             </a:r>
           </a:p>
           <a:p>
@@ -1615,44 +1615,15 @@
             </a:pPr>
             <a:r>
               <a:rPr lang="de-DE" sz="1450" dirty="0"/>
-              <a:t>München </a:t>
-            </a:r>
-          </a:p>
-          <a:p>
-            <a:pPr lvl="0" indent="0">
-              <a:lnSpc>
-                <a:spcPct val="97000"/>
-              </a:lnSpc>
-              <a:spcBef>
-                <a:spcPts val="0"/>
-              </a:spcBef>
-              <a:buFont typeface="Arial" panose="020B0604020202020204" pitchFamily="34" charset="0"/>
-              <a:buNone/>
-            </a:pPr>
-            <a:r>
-              <a:rPr lang="de-DE" sz="1450" dirty="0"/>
               <a:t>University </a:t>
             </a:r>
             <a:r>
               <a:rPr lang="de-DE" sz="1450" dirty="0" err="1"/>
               <a:t>of</a:t>
             </a:r>
-            <a:endParaRPr lang="de-DE" sz="1450" dirty="0"/>
-          </a:p>
-          <a:p>
-            <a:pPr lvl="0" indent="0">
-              <a:lnSpc>
-                <a:spcPct val="97000"/>
-              </a:lnSpc>
-              <a:spcBef>
-                <a:spcPts val="0"/>
-              </a:spcBef>
-              <a:buFont typeface="Arial" panose="020B0604020202020204" pitchFamily="34" charset="0"/>
-              <a:buNone/>
-            </a:pPr>
             <a:r>
               <a:rPr lang="de-DE" sz="1450" dirty="0"/>
-              <a:t>Applied Sciences</a:t>
+              <a:t> Applied Sciences</a:t>
             </a:r>
           </a:p>
         </p:txBody>
@@ -3171,7 +3142,7 @@
             <a:fld id="{A13361CF-9A47-4C8C-A01E-566DC0626ACC}" type="slidenum">
               <a:rPr lang="de-DE" smtClean="0"/>
               <a:pPr/>
-              <a:t>‹Nr.›</a:t>
+              <a:t>‹#›</a:t>
             </a:fld>
             <a:endParaRPr lang="de-DE"/>
           </a:p>
@@ -3513,7 +3484,7 @@
             <a:fld id="{A13361CF-9A47-4C8C-A01E-566DC0626ACC}" type="slidenum">
               <a:rPr lang="de-DE" smtClean="0"/>
               <a:pPr/>
-              <a:t>‹Nr.›</a:t>
+              <a:t>‹#›</a:t>
             </a:fld>
             <a:endParaRPr lang="de-DE"/>
           </a:p>
@@ -3855,7 +3826,7 @@
             <a:fld id="{A13361CF-9A47-4C8C-A01E-566DC0626ACC}" type="slidenum">
               <a:rPr lang="de-DE" smtClean="0"/>
               <a:pPr/>
-              <a:t>‹Nr.›</a:t>
+              <a:t>‹#›</a:t>
             </a:fld>
             <a:endParaRPr lang="de-DE"/>
           </a:p>
@@ -4342,7 +4313,7 @@
             <a:fld id="{A13361CF-9A47-4C8C-A01E-566DC0626ACC}" type="slidenum">
               <a:rPr lang="de-DE" smtClean="0"/>
               <a:pPr/>
-              <a:t>‹Nr.›</a:t>
+              <a:t>‹#›</a:t>
             </a:fld>
             <a:endParaRPr lang="de-DE"/>
           </a:p>
@@ -5015,7 +4986,7 @@
             <a:fld id="{A13361CF-9A47-4C8C-A01E-566DC0626ACC}" type="slidenum">
               <a:rPr lang="de-DE" smtClean="0"/>
               <a:pPr/>
-              <a:t>‹Nr.›</a:t>
+              <a:t>‹#›</a:t>
             </a:fld>
             <a:endParaRPr lang="de-DE"/>
           </a:p>
@@ -5316,7 +5287,7 @@
             <a:fld id="{A13361CF-9A47-4C8C-A01E-566DC0626ACC}" type="slidenum">
               <a:rPr lang="de-DE" smtClean="0"/>
               <a:pPr/>
-              <a:t>‹Nr.›</a:t>
+              <a:t>‹#›</a:t>
             </a:fld>
             <a:endParaRPr lang="de-DE"/>
           </a:p>
@@ -5525,7 +5496,7 @@
             <a:fld id="{A13361CF-9A47-4C8C-A01E-566DC0626ACC}" type="slidenum">
               <a:rPr lang="de-DE" smtClean="0"/>
               <a:pPr/>
-              <a:t>‹Nr.›</a:t>
+              <a:t>‹#›</a:t>
             </a:fld>
             <a:endParaRPr lang="de-DE" dirty="0"/>
           </a:p>
